--- a/output/wordlabs-weak-3day.pptx
+++ b/output/wordlabs-weak-3day.pptx
@@ -6040,7 +6040,7 @@
                 <a:ea typeface="Calibri" pitchFamily="34" charset="-122"/>
                 <a:cs typeface="Calibri" pitchFamily="34" charset="-120"/>
               </a:rPr>
-              <a:t>The illness began to </a:t>
+              <a:t>The illness had </a:t>
             </a:r>
             <a:pPr algn="l" indent="0" marL="0">
               <a:buNone/>
@@ -6057,7 +6057,7 @@
                 <a:ea typeface="Calibri" pitchFamily="34" charset="-122"/>
                 <a:cs typeface="Calibri" pitchFamily="34" charset="-120"/>
               </a:rPr>
-              <a:t>weaken</a:t>
+              <a:t>weakened</a:t>
             </a:r>
             <a:pPr algn="l" indent="0" marL="0">
               <a:buNone/>
@@ -6071,7 +6071,7 @@
                 <a:ea typeface="Calibri" pitchFamily="34" charset="-122"/>
                 <a:cs typeface="Calibri" pitchFamily="34" charset="-120"/>
               </a:rPr>
-              <a:t> him, but his </a:t>
+              <a:t> him greatly, and his </a:t>
             </a:r>
             <a:pPr algn="l" indent="0" marL="0">
               <a:buNone/>
@@ -6102,7 +6102,7 @@
                 <a:ea typeface="Calibri" pitchFamily="34" charset="-122"/>
                 <a:cs typeface="Calibri" pitchFamily="34" charset="-120"/>
               </a:rPr>
-              <a:t> never stopped him from trying.</a:t>
+              <a:t> meant he needed extra rest.</a:t>
             </a:r>
             <a:endParaRPr lang="en-US" sz="1800" dirty="0"/>
           </a:p>
@@ -6257,7 +6257,7 @@
                 <a:ea typeface="Trebuchet MS" pitchFamily="34" charset="-122"/>
                 <a:cs typeface="Trebuchet MS" pitchFamily="34" charset="-120"/>
               </a:rPr>
-              <a:t>weaken</a:t>
+              <a:t>weakened</a:t>
             </a:r>
             <a:endParaRPr lang="en-US" sz="1400" dirty="0"/>
           </a:p>
@@ -6855,7 +6855,7 @@
                 <a:ea typeface="Trebuchet MS" pitchFamily="34" charset="-122"/>
                 <a:cs typeface="Trebuchet MS" pitchFamily="34" charset="-120"/>
               </a:rPr>
-              <a:t>weaken</a:t>
+              <a:t>weakened</a:t>
             </a:r>
             <a:endParaRPr lang="en-US" sz="2800" dirty="0"/>
           </a:p>
@@ -7682,7 +7682,7 @@
                 <a:ea typeface="Trebuchet MS" pitchFamily="34" charset="-122"/>
                 <a:cs typeface="Trebuchet MS" pitchFamily="34" charset="-120"/>
               </a:rPr>
-              <a:t>weaken</a:t>
+              <a:t>weakened</a:t>
             </a:r>
             <a:endParaRPr lang="en-US" sz="2800" dirty="0"/>
           </a:p>
@@ -7762,7 +7762,7 @@
         </p:nvSpPr>
         <p:spPr>
           <a:xfrm>
-            <a:off x="2938272" y="2258568"/>
+            <a:off x="2221992" y="2258568"/>
             <a:ext cx="1828800" cy="292608"/>
           </a:xfrm>
           <a:prstGeom prst="rect">
@@ -7796,7 +7796,7 @@
         </p:nvSpPr>
         <p:spPr>
           <a:xfrm>
-            <a:off x="2938272" y="2258568"/>
+            <a:off x="2221992" y="2258568"/>
             <a:ext cx="1828800" cy="292608"/>
           </a:xfrm>
           <a:prstGeom prst="rect">
@@ -7835,7 +7835,7 @@
         </p:nvSpPr>
         <p:spPr>
           <a:xfrm>
-            <a:off x="2938272" y="2569464"/>
+            <a:off x="2221992" y="2569464"/>
             <a:ext cx="1828800" cy="201168"/>
           </a:xfrm>
           <a:prstGeom prst="rect">
@@ -7874,7 +7874,7 @@
         </p:nvSpPr>
         <p:spPr>
           <a:xfrm>
-            <a:off x="5803392" y="2258568"/>
+            <a:off x="4370832" y="2258568"/>
             <a:ext cx="1828800" cy="292608"/>
           </a:xfrm>
           <a:prstGeom prst="rect">
@@ -7908,7 +7908,7 @@
         </p:nvSpPr>
         <p:spPr>
           <a:xfrm>
-            <a:off x="5803392" y="2258568"/>
+            <a:off x="4370832" y="2258568"/>
             <a:ext cx="1828800" cy="292608"/>
           </a:xfrm>
           <a:prstGeom prst="rect">
@@ -7947,7 +7947,7 @@
         </p:nvSpPr>
         <p:spPr>
           <a:xfrm>
-            <a:off x="5803392" y="2569464"/>
+            <a:off x="4370832" y="2569464"/>
             <a:ext cx="1828800" cy="201168"/>
           </a:xfrm>
           <a:prstGeom prst="rect">
@@ -7986,6 +7986,118 @@
         </p:nvSpPr>
         <p:spPr>
           <a:xfrm>
+            <a:off x="6519672" y="2258568"/>
+            <a:ext cx="1828800" cy="292608"/>
+          </a:xfrm>
+          <a:prstGeom prst="rect">
+            <a:avLst>
+              <a:gd name="adj" fmla="val 25000"/>
+            </a:avLst>
+          </a:prstGeom>
+          <a:solidFill>
+            <a:srgbClr val="FCE7F3"/>
+          </a:solidFill>
+          <a:ln w="19050">
+            <a:solidFill>
+              <a:srgbClr val="DB2777"/>
+            </a:solidFill>
+            <a:prstDash val="solid"/>
+          </a:ln>
+          <a:effectLst>
+            <a:outerShdw sx="100000" sy="100000" kx="0" ky="0" algn="bl" rotWithShape="0" blurRad="101600" dist="38100" dir="8100000">
+              <a:srgbClr val="000000">
+                <a:alpha val="12000"/>
+              </a:srgbClr>
+            </a:outerShdw>
+          </a:effectLst>
+        </p:spPr>
+      </p:sp>
+      <p:sp>
+        <p:nvSpPr>
+          <p:cNvPr id="23" name="Text 21"/>
+          <p:cNvSpPr/>
+          <p:nvPr/>
+        </p:nvSpPr>
+        <p:spPr>
+          <a:xfrm>
+            <a:off x="6519672" y="2258568"/>
+            <a:ext cx="1828800" cy="292608"/>
+          </a:xfrm>
+          <a:prstGeom prst="rect">
+            <a:avLst/>
+          </a:prstGeom>
+          <a:noFill/>
+          <a:ln/>
+        </p:spPr>
+        <p:txBody>
+          <a:bodyPr wrap="square" lIns="0" tIns="0" rIns="0" bIns="0" rtlCol="0" anchor="ctr"/>
+          <a:lstStyle/>
+          <a:p>
+            <a:pPr algn="ctr" indent="0" marL="0">
+              <a:buNone/>
+            </a:pPr>
+            <a:r>
+              <a:rPr lang="en-US" sz="1300" b="1" dirty="0">
+                <a:solidFill>
+                  <a:srgbClr val="9D174D"/>
+                </a:solidFill>
+                <a:latin typeface="Trebuchet MS" pitchFamily="34" charset="0"/>
+                <a:ea typeface="Trebuchet MS" pitchFamily="34" charset="-122"/>
+                <a:cs typeface="Trebuchet MS" pitchFamily="34" charset="-120"/>
+              </a:rPr>
+              <a:t>ed</a:t>
+            </a:r>
+            <a:endParaRPr lang="en-US" sz="1300" dirty="0"/>
+          </a:p>
+        </p:txBody>
+      </p:sp>
+      <p:sp>
+        <p:nvSpPr>
+          <p:cNvPr id="24" name="Text 22"/>
+          <p:cNvSpPr/>
+          <p:nvPr/>
+        </p:nvSpPr>
+        <p:spPr>
+          <a:xfrm>
+            <a:off x="6519672" y="2569464"/>
+            <a:ext cx="1828800" cy="201168"/>
+          </a:xfrm>
+          <a:prstGeom prst="rect">
+            <a:avLst/>
+          </a:prstGeom>
+          <a:noFill/>
+          <a:ln/>
+        </p:spPr>
+        <p:txBody>
+          <a:bodyPr wrap="square" lIns="0" tIns="0" rIns="0" bIns="0" rtlCol="0" anchor="t"/>
+          <a:lstStyle/>
+          <a:p>
+            <a:pPr algn="ctr" indent="0" marL="0">
+              <a:buNone/>
+            </a:pPr>
+            <a:r>
+              <a:rPr lang="en-US" sz="850" dirty="0">
+                <a:solidFill>
+                  <a:srgbClr val="475569"/>
+                </a:solidFill>
+                <a:latin typeface="Calibri" pitchFamily="34" charset="0"/>
+                <a:ea typeface="Calibri" pitchFamily="34" charset="-122"/>
+                <a:cs typeface="Calibri" pitchFamily="34" charset="-120"/>
+              </a:rPr>
+              <a:t>past tense</a:t>
+            </a:r>
+            <a:endParaRPr lang="en-US" sz="850" dirty="0"/>
+          </a:p>
+        </p:txBody>
+      </p:sp>
+      <p:sp>
+        <p:nvSpPr>
+          <p:cNvPr id="25" name="Shape 23"/>
+          <p:cNvSpPr/>
+          <p:nvPr/>
+        </p:nvSpPr>
+        <p:spPr>
+          <a:xfrm>
             <a:off x="365760" y="3273552"/>
             <a:ext cx="1371600" cy="658368"/>
           </a:xfrm>
@@ -8007,7 +8119,7 @@
       </p:sp>
       <p:sp>
         <p:nvSpPr>
-          <p:cNvPr id="23" name="Text 21"/>
+          <p:cNvPr id="26" name="Text 24"/>
           <p:cNvSpPr/>
           <p:nvPr/>
         </p:nvSpPr>
@@ -8046,7 +8158,7 @@
       </p:sp>
       <p:sp>
         <p:nvSpPr>
-          <p:cNvPr id="24" name="Shape 22"/>
+          <p:cNvPr id="27" name="Shape 25"/>
           <p:cNvSpPr/>
           <p:nvPr/>
         </p:nvSpPr>
@@ -8073,7 +8185,7 @@
       </p:sp>
       <p:sp>
         <p:nvSpPr>
-          <p:cNvPr id="25" name="Text 23"/>
+          <p:cNvPr id="28" name="Text 26"/>
           <p:cNvSpPr/>
           <p:nvPr/>
         </p:nvSpPr>
@@ -8112,7 +8224,7 @@
       </p:sp>
       <p:sp>
         <p:nvSpPr>
-          <p:cNvPr id="26" name="Shape 24"/>
+          <p:cNvPr id="29" name="Shape 27"/>
           <p:cNvSpPr/>
           <p:nvPr/>
         </p:nvSpPr>
@@ -8139,7 +8251,7 @@
       </p:sp>
       <p:sp>
         <p:nvSpPr>
-          <p:cNvPr id="27" name="Text 25"/>
+          <p:cNvPr id="30" name="Text 28"/>
           <p:cNvSpPr/>
           <p:nvPr/>
         </p:nvSpPr>
@@ -8178,7 +8290,7 @@
       </p:sp>
       <p:sp>
         <p:nvSpPr>
-          <p:cNvPr id="28" name="Shape 26"/>
+          <p:cNvPr id="31" name="Shape 29"/>
           <p:cNvSpPr/>
           <p:nvPr/>
         </p:nvSpPr>
@@ -8205,7 +8317,7 @@
       </p:sp>
       <p:sp>
         <p:nvSpPr>
-          <p:cNvPr id="29" name="Text 27"/>
+          <p:cNvPr id="32" name="Text 30"/>
           <p:cNvSpPr/>
           <p:nvPr/>
         </p:nvSpPr>
@@ -8667,7 +8779,7 @@
                 <a:ea typeface="Trebuchet MS" pitchFamily="34" charset="-122"/>
                 <a:cs typeface="Trebuchet MS" pitchFamily="34" charset="-120"/>
               </a:rPr>
-              <a:t>weaken</a:t>
+              <a:t>weakened</a:t>
             </a:r>
             <a:endParaRPr lang="en-US" sz="2800" dirty="0"/>
           </a:p>
@@ -8747,7 +8859,7 @@
         </p:nvSpPr>
         <p:spPr>
           <a:xfrm>
-            <a:off x="2938272" y="2258568"/>
+            <a:off x="2221992" y="2258568"/>
             <a:ext cx="1828800" cy="292608"/>
           </a:xfrm>
           <a:prstGeom prst="rect">
@@ -8781,7 +8893,7 @@
         </p:nvSpPr>
         <p:spPr>
           <a:xfrm>
-            <a:off x="2938272" y="2258568"/>
+            <a:off x="2221992" y="2258568"/>
             <a:ext cx="1828800" cy="292608"/>
           </a:xfrm>
           <a:prstGeom prst="rect">
@@ -8820,7 +8932,7 @@
         </p:nvSpPr>
         <p:spPr>
           <a:xfrm>
-            <a:off x="2938272" y="2569464"/>
+            <a:off x="2221992" y="2569464"/>
             <a:ext cx="1828800" cy="201168"/>
           </a:xfrm>
           <a:prstGeom prst="rect">
@@ -8859,7 +8971,7 @@
         </p:nvSpPr>
         <p:spPr>
           <a:xfrm>
-            <a:off x="5803392" y="2258568"/>
+            <a:off x="4370832" y="2258568"/>
             <a:ext cx="1828800" cy="292608"/>
           </a:xfrm>
           <a:prstGeom prst="rect">
@@ -8893,7 +9005,7 @@
         </p:nvSpPr>
         <p:spPr>
           <a:xfrm>
-            <a:off x="5803392" y="2258568"/>
+            <a:off x="4370832" y="2258568"/>
             <a:ext cx="1828800" cy="292608"/>
           </a:xfrm>
           <a:prstGeom prst="rect">
@@ -8932,7 +9044,7 @@
         </p:nvSpPr>
         <p:spPr>
           <a:xfrm>
-            <a:off x="5803392" y="2569464"/>
+            <a:off x="4370832" y="2569464"/>
             <a:ext cx="1828800" cy="201168"/>
           </a:xfrm>
           <a:prstGeom prst="rect">
@@ -8971,6 +9083,118 @@
         </p:nvSpPr>
         <p:spPr>
           <a:xfrm>
+            <a:off x="6519672" y="2258568"/>
+            <a:ext cx="1828800" cy="292608"/>
+          </a:xfrm>
+          <a:prstGeom prst="rect">
+            <a:avLst>
+              <a:gd name="adj" fmla="val 25000"/>
+            </a:avLst>
+          </a:prstGeom>
+          <a:solidFill>
+            <a:srgbClr val="FCE7F3"/>
+          </a:solidFill>
+          <a:ln w="19050">
+            <a:solidFill>
+              <a:srgbClr val="DB2777"/>
+            </a:solidFill>
+            <a:prstDash val="solid"/>
+          </a:ln>
+          <a:effectLst>
+            <a:outerShdw sx="100000" sy="100000" kx="0" ky="0" algn="bl" rotWithShape="0" blurRad="101600" dist="38100" dir="8100000">
+              <a:srgbClr val="000000">
+                <a:alpha val="12000"/>
+              </a:srgbClr>
+            </a:outerShdw>
+          </a:effectLst>
+        </p:spPr>
+      </p:sp>
+      <p:sp>
+        <p:nvSpPr>
+          <p:cNvPr id="23" name="Text 21"/>
+          <p:cNvSpPr/>
+          <p:nvPr/>
+        </p:nvSpPr>
+        <p:spPr>
+          <a:xfrm>
+            <a:off x="6519672" y="2258568"/>
+            <a:ext cx="1828800" cy="292608"/>
+          </a:xfrm>
+          <a:prstGeom prst="rect">
+            <a:avLst/>
+          </a:prstGeom>
+          <a:noFill/>
+          <a:ln/>
+        </p:spPr>
+        <p:txBody>
+          <a:bodyPr wrap="square" lIns="0" tIns="0" rIns="0" bIns="0" rtlCol="0" anchor="ctr"/>
+          <a:lstStyle/>
+          <a:p>
+            <a:pPr algn="ctr" indent="0" marL="0">
+              <a:buNone/>
+            </a:pPr>
+            <a:r>
+              <a:rPr lang="en-US" sz="1300" b="1" dirty="0">
+                <a:solidFill>
+                  <a:srgbClr val="9D174D"/>
+                </a:solidFill>
+                <a:latin typeface="Trebuchet MS" pitchFamily="34" charset="0"/>
+                <a:ea typeface="Trebuchet MS" pitchFamily="34" charset="-122"/>
+                <a:cs typeface="Trebuchet MS" pitchFamily="34" charset="-120"/>
+              </a:rPr>
+              <a:t>ed</a:t>
+            </a:r>
+            <a:endParaRPr lang="en-US" sz="1300" dirty="0"/>
+          </a:p>
+        </p:txBody>
+      </p:sp>
+      <p:sp>
+        <p:nvSpPr>
+          <p:cNvPr id="24" name="Text 22"/>
+          <p:cNvSpPr/>
+          <p:nvPr/>
+        </p:nvSpPr>
+        <p:spPr>
+          <a:xfrm>
+            <a:off x="6519672" y="2569464"/>
+            <a:ext cx="1828800" cy="201168"/>
+          </a:xfrm>
+          <a:prstGeom prst="rect">
+            <a:avLst/>
+          </a:prstGeom>
+          <a:noFill/>
+          <a:ln/>
+        </p:spPr>
+        <p:txBody>
+          <a:bodyPr wrap="square" lIns="0" tIns="0" rIns="0" bIns="0" rtlCol="0" anchor="t"/>
+          <a:lstStyle/>
+          <a:p>
+            <a:pPr algn="ctr" indent="0" marL="0">
+              <a:buNone/>
+            </a:pPr>
+            <a:r>
+              <a:rPr lang="en-US" sz="850" dirty="0">
+                <a:solidFill>
+                  <a:srgbClr val="475569"/>
+                </a:solidFill>
+                <a:latin typeface="Calibri" pitchFamily="34" charset="0"/>
+                <a:ea typeface="Calibri" pitchFamily="34" charset="-122"/>
+                <a:cs typeface="Calibri" pitchFamily="34" charset="-120"/>
+              </a:rPr>
+              <a:t>past tense</a:t>
+            </a:r>
+            <a:endParaRPr lang="en-US" sz="850" dirty="0"/>
+          </a:p>
+        </p:txBody>
+      </p:sp>
+      <p:sp>
+        <p:nvSpPr>
+          <p:cNvPr id="25" name="Shape 23"/>
+          <p:cNvSpPr/>
+          <p:nvPr/>
+        </p:nvSpPr>
+        <p:spPr>
+          <a:xfrm>
             <a:off x="365760" y="3273552"/>
             <a:ext cx="1371600" cy="658368"/>
           </a:xfrm>
@@ -8992,7 +9216,7 @@
       </p:sp>
       <p:sp>
         <p:nvSpPr>
-          <p:cNvPr id="23" name="Text 21"/>
+          <p:cNvPr id="26" name="Text 24"/>
           <p:cNvSpPr/>
           <p:nvPr/>
         </p:nvSpPr>
@@ -9031,7 +9255,7 @@
       </p:sp>
       <p:sp>
         <p:nvSpPr>
-          <p:cNvPr id="24" name="Shape 22"/>
+          <p:cNvPr id="27" name="Shape 25"/>
           <p:cNvSpPr/>
           <p:nvPr/>
         </p:nvSpPr>
@@ -9058,7 +9282,7 @@
       </p:sp>
       <p:sp>
         <p:nvSpPr>
-          <p:cNvPr id="25" name="Shape 23"/>
+          <p:cNvPr id="28" name="Shape 26"/>
           <p:cNvSpPr/>
           <p:nvPr/>
         </p:nvSpPr>
@@ -9085,7 +9309,7 @@
       </p:sp>
       <p:sp>
         <p:nvSpPr>
-          <p:cNvPr id="26" name="Text 24"/>
+          <p:cNvPr id="29" name="Text 27"/>
           <p:cNvSpPr/>
           <p:nvPr/>
         </p:nvSpPr>
@@ -9124,7 +9348,7 @@
       </p:sp>
       <p:sp>
         <p:nvSpPr>
-          <p:cNvPr id="27" name="Text 25"/>
+          <p:cNvPr id="30" name="Text 28"/>
           <p:cNvSpPr/>
           <p:nvPr/>
         </p:nvSpPr>
@@ -9163,7 +9387,7 @@
       </p:sp>
       <p:sp>
         <p:nvSpPr>
-          <p:cNvPr id="28" name="Shape 26"/>
+          <p:cNvPr id="31" name="Shape 29"/>
           <p:cNvSpPr/>
           <p:nvPr/>
         </p:nvSpPr>
@@ -9190,7 +9414,7 @@
       </p:sp>
       <p:sp>
         <p:nvSpPr>
-          <p:cNvPr id="29" name="Text 27"/>
+          <p:cNvPr id="32" name="Text 30"/>
           <p:cNvSpPr/>
           <p:nvPr/>
         </p:nvSpPr>
@@ -9221,7 +9445,7 @@
                 <a:ea typeface="Trebuchet MS" pitchFamily="34" charset="-122"/>
                 <a:cs typeface="Trebuchet MS" pitchFamily="34" charset="-120"/>
               </a:rPr>
-              <a:t>en</a:t>
+              <a:t>ened</a:t>
             </a:r>
             <a:endParaRPr lang="en-US" sz="1400" dirty="0"/>
           </a:p>
@@ -9229,7 +9453,7 @@
       </p:sp>
       <p:sp>
         <p:nvSpPr>
-          <p:cNvPr id="30" name="Shape 28"/>
+          <p:cNvPr id="33" name="Shape 31"/>
           <p:cNvSpPr/>
           <p:nvPr/>
         </p:nvSpPr>
@@ -9256,7 +9480,7 @@
       </p:sp>
       <p:sp>
         <p:nvSpPr>
-          <p:cNvPr id="31" name="Text 29"/>
+          <p:cNvPr id="34" name="Text 32"/>
           <p:cNvSpPr/>
           <p:nvPr/>
         </p:nvSpPr>
@@ -9295,7 +9519,7 @@
       </p:sp>
       <p:sp>
         <p:nvSpPr>
-          <p:cNvPr id="32" name="Shape 30"/>
+          <p:cNvPr id="35" name="Shape 33"/>
           <p:cNvSpPr/>
           <p:nvPr/>
         </p:nvSpPr>
@@ -9322,7 +9546,7 @@
       </p:sp>
       <p:sp>
         <p:nvSpPr>
-          <p:cNvPr id="33" name="Text 31"/>
+          <p:cNvPr id="36" name="Text 34"/>
           <p:cNvSpPr/>
           <p:nvPr/>
         </p:nvSpPr>
@@ -9784,7 +10008,7 @@
                 <a:ea typeface="Trebuchet MS" pitchFamily="34" charset="-122"/>
                 <a:cs typeface="Trebuchet MS" pitchFamily="34" charset="-120"/>
               </a:rPr>
-              <a:t>weaken</a:t>
+              <a:t>weakened</a:t>
             </a:r>
             <a:endParaRPr lang="en-US" sz="2800" dirty="0"/>
           </a:p>
@@ -9864,7 +10088,7 @@
         </p:nvSpPr>
         <p:spPr>
           <a:xfrm>
-            <a:off x="2938272" y="2258568"/>
+            <a:off x="2221992" y="2258568"/>
             <a:ext cx="1828800" cy="292608"/>
           </a:xfrm>
           <a:prstGeom prst="rect">
@@ -9898,7 +10122,7 @@
         </p:nvSpPr>
         <p:spPr>
           <a:xfrm>
-            <a:off x="2938272" y="2258568"/>
+            <a:off x="2221992" y="2258568"/>
             <a:ext cx="1828800" cy="292608"/>
           </a:xfrm>
           <a:prstGeom prst="rect">
@@ -9937,7 +10161,7 @@
         </p:nvSpPr>
         <p:spPr>
           <a:xfrm>
-            <a:off x="2938272" y="2569464"/>
+            <a:off x="2221992" y="2569464"/>
             <a:ext cx="1828800" cy="201168"/>
           </a:xfrm>
           <a:prstGeom prst="rect">
@@ -9976,7 +10200,7 @@
         </p:nvSpPr>
         <p:spPr>
           <a:xfrm>
-            <a:off x="5803392" y="2258568"/>
+            <a:off x="4370832" y="2258568"/>
             <a:ext cx="1828800" cy="292608"/>
           </a:xfrm>
           <a:prstGeom prst="rect">
@@ -10010,7 +10234,7 @@
         </p:nvSpPr>
         <p:spPr>
           <a:xfrm>
-            <a:off x="5803392" y="2258568"/>
+            <a:off x="4370832" y="2258568"/>
             <a:ext cx="1828800" cy="292608"/>
           </a:xfrm>
           <a:prstGeom prst="rect">
@@ -10049,7 +10273,7 @@
         </p:nvSpPr>
         <p:spPr>
           <a:xfrm>
-            <a:off x="5803392" y="2569464"/>
+            <a:off x="4370832" y="2569464"/>
             <a:ext cx="1828800" cy="201168"/>
           </a:xfrm>
           <a:prstGeom prst="rect">
@@ -10088,6 +10312,118 @@
         </p:nvSpPr>
         <p:spPr>
           <a:xfrm>
+            <a:off x="6519672" y="2258568"/>
+            <a:ext cx="1828800" cy="292608"/>
+          </a:xfrm>
+          <a:prstGeom prst="rect">
+            <a:avLst>
+              <a:gd name="adj" fmla="val 25000"/>
+            </a:avLst>
+          </a:prstGeom>
+          <a:solidFill>
+            <a:srgbClr val="FCE7F3"/>
+          </a:solidFill>
+          <a:ln w="19050">
+            <a:solidFill>
+              <a:srgbClr val="DB2777"/>
+            </a:solidFill>
+            <a:prstDash val="solid"/>
+          </a:ln>
+          <a:effectLst>
+            <a:outerShdw sx="100000" sy="100000" kx="0" ky="0" algn="bl" rotWithShape="0" blurRad="101600" dist="38100" dir="8100000">
+              <a:srgbClr val="000000">
+                <a:alpha val="12000"/>
+              </a:srgbClr>
+            </a:outerShdw>
+          </a:effectLst>
+        </p:spPr>
+      </p:sp>
+      <p:sp>
+        <p:nvSpPr>
+          <p:cNvPr id="23" name="Text 21"/>
+          <p:cNvSpPr/>
+          <p:nvPr/>
+        </p:nvSpPr>
+        <p:spPr>
+          <a:xfrm>
+            <a:off x="6519672" y="2258568"/>
+            <a:ext cx="1828800" cy="292608"/>
+          </a:xfrm>
+          <a:prstGeom prst="rect">
+            <a:avLst/>
+          </a:prstGeom>
+          <a:noFill/>
+          <a:ln/>
+        </p:spPr>
+        <p:txBody>
+          <a:bodyPr wrap="square" lIns="0" tIns="0" rIns="0" bIns="0" rtlCol="0" anchor="ctr"/>
+          <a:lstStyle/>
+          <a:p>
+            <a:pPr algn="ctr" indent="0" marL="0">
+              <a:buNone/>
+            </a:pPr>
+            <a:r>
+              <a:rPr lang="en-US" sz="1300" b="1" dirty="0">
+                <a:solidFill>
+                  <a:srgbClr val="9D174D"/>
+                </a:solidFill>
+                <a:latin typeface="Trebuchet MS" pitchFamily="34" charset="0"/>
+                <a:ea typeface="Trebuchet MS" pitchFamily="34" charset="-122"/>
+                <a:cs typeface="Trebuchet MS" pitchFamily="34" charset="-120"/>
+              </a:rPr>
+              <a:t>ed</a:t>
+            </a:r>
+            <a:endParaRPr lang="en-US" sz="1300" dirty="0"/>
+          </a:p>
+        </p:txBody>
+      </p:sp>
+      <p:sp>
+        <p:nvSpPr>
+          <p:cNvPr id="24" name="Text 22"/>
+          <p:cNvSpPr/>
+          <p:nvPr/>
+        </p:nvSpPr>
+        <p:spPr>
+          <a:xfrm>
+            <a:off x="6519672" y="2569464"/>
+            <a:ext cx="1828800" cy="201168"/>
+          </a:xfrm>
+          <a:prstGeom prst="rect">
+            <a:avLst/>
+          </a:prstGeom>
+          <a:noFill/>
+          <a:ln/>
+        </p:spPr>
+        <p:txBody>
+          <a:bodyPr wrap="square" lIns="0" tIns="0" rIns="0" bIns="0" rtlCol="0" anchor="t"/>
+          <a:lstStyle/>
+          <a:p>
+            <a:pPr algn="ctr" indent="0" marL="0">
+              <a:buNone/>
+            </a:pPr>
+            <a:r>
+              <a:rPr lang="en-US" sz="850" dirty="0">
+                <a:solidFill>
+                  <a:srgbClr val="475569"/>
+                </a:solidFill>
+                <a:latin typeface="Calibri" pitchFamily="34" charset="0"/>
+                <a:ea typeface="Calibri" pitchFamily="34" charset="-122"/>
+                <a:cs typeface="Calibri" pitchFamily="34" charset="-120"/>
+              </a:rPr>
+              <a:t>past tense</a:t>
+            </a:r>
+            <a:endParaRPr lang="en-US" sz="850" dirty="0"/>
+          </a:p>
+        </p:txBody>
+      </p:sp>
+      <p:sp>
+        <p:nvSpPr>
+          <p:cNvPr id="25" name="Shape 23"/>
+          <p:cNvSpPr/>
+          <p:nvPr/>
+        </p:nvSpPr>
+        <p:spPr>
+          <a:xfrm>
             <a:off x="365760" y="3273552"/>
             <a:ext cx="1371600" cy="658368"/>
           </a:xfrm>
@@ -10109,7 +10445,7 @@
       </p:sp>
       <p:sp>
         <p:nvSpPr>
-          <p:cNvPr id="23" name="Text 21"/>
+          <p:cNvPr id="26" name="Text 24"/>
           <p:cNvSpPr/>
           <p:nvPr/>
         </p:nvSpPr>
@@ -10148,7 +10484,7 @@
       </p:sp>
       <p:sp>
         <p:nvSpPr>
-          <p:cNvPr id="24" name="Shape 22"/>
+          <p:cNvPr id="27" name="Shape 25"/>
           <p:cNvSpPr/>
           <p:nvPr/>
         </p:nvSpPr>
@@ -10175,7 +10511,7 @@
       </p:sp>
       <p:sp>
         <p:nvSpPr>
-          <p:cNvPr id="25" name="Shape 23"/>
+          <p:cNvPr id="28" name="Shape 26"/>
           <p:cNvSpPr/>
           <p:nvPr/>
         </p:nvSpPr>
@@ -10202,7 +10538,7 @@
       </p:sp>
       <p:sp>
         <p:nvSpPr>
-          <p:cNvPr id="26" name="Text 24"/>
+          <p:cNvPr id="29" name="Text 27"/>
           <p:cNvSpPr/>
           <p:nvPr/>
         </p:nvSpPr>
@@ -10241,7 +10577,7 @@
       </p:sp>
       <p:sp>
         <p:nvSpPr>
-          <p:cNvPr id="27" name="Text 25"/>
+          <p:cNvPr id="30" name="Text 28"/>
           <p:cNvSpPr/>
           <p:nvPr/>
         </p:nvSpPr>
@@ -10280,7 +10616,7 @@
       </p:sp>
       <p:sp>
         <p:nvSpPr>
-          <p:cNvPr id="28" name="Shape 26"/>
+          <p:cNvPr id="31" name="Shape 29"/>
           <p:cNvSpPr/>
           <p:nvPr/>
         </p:nvSpPr>
@@ -10307,7 +10643,7 @@
       </p:sp>
       <p:sp>
         <p:nvSpPr>
-          <p:cNvPr id="29" name="Text 27"/>
+          <p:cNvPr id="32" name="Text 30"/>
           <p:cNvSpPr/>
           <p:nvPr/>
         </p:nvSpPr>
@@ -10338,7 +10674,7 @@
                 <a:ea typeface="Trebuchet MS" pitchFamily="34" charset="-122"/>
                 <a:cs typeface="Trebuchet MS" pitchFamily="34" charset="-120"/>
               </a:rPr>
-              <a:t>en</a:t>
+              <a:t>ened</a:t>
             </a:r>
             <a:endParaRPr lang="en-US" sz="1400" dirty="0"/>
           </a:p>
@@ -10346,7 +10682,7 @@
       </p:sp>
       <p:sp>
         <p:nvSpPr>
-          <p:cNvPr id="30" name="Shape 28"/>
+          <p:cNvPr id="33" name="Shape 31"/>
           <p:cNvSpPr/>
           <p:nvPr/>
         </p:nvSpPr>
@@ -10373,7 +10709,7 @@
       </p:sp>
       <p:sp>
         <p:nvSpPr>
-          <p:cNvPr id="31" name="Text 29"/>
+          <p:cNvPr id="34" name="Text 32"/>
           <p:cNvSpPr/>
           <p:nvPr/>
         </p:nvSpPr>
@@ -10412,7 +10748,7 @@
       </p:sp>
       <p:sp>
         <p:nvSpPr>
-          <p:cNvPr id="32" name="Shape 30"/>
+          <p:cNvPr id="35" name="Shape 33"/>
           <p:cNvSpPr/>
           <p:nvPr/>
         </p:nvSpPr>
@@ -10439,13 +10775,13 @@
       </p:sp>
       <p:sp>
         <p:nvSpPr>
-          <p:cNvPr id="33" name="Shape 31"/>
-          <p:cNvSpPr/>
-          <p:nvPr/>
-        </p:nvSpPr>
-        <p:spPr>
-          <a:xfrm>
-            <a:off x="2427732" y="4169664"/>
+          <p:cNvPr id="36" name="Shape 34"/>
+          <p:cNvSpPr/>
+          <p:nvPr/>
+        </p:nvSpPr>
+        <p:spPr>
+          <a:xfrm>
+            <a:off x="2254649" y="4169664"/>
             <a:ext cx="685800" cy="475488"/>
           </a:xfrm>
           <a:prstGeom prst="rect">
@@ -10466,13 +10802,13 @@
       </p:sp>
       <p:sp>
         <p:nvSpPr>
-          <p:cNvPr id="34" name="Text 32"/>
-          <p:cNvSpPr/>
-          <p:nvPr/>
-        </p:nvSpPr>
-        <p:spPr>
-          <a:xfrm>
-            <a:off x="2427732" y="4169664"/>
+          <p:cNvPr id="37" name="Text 35"/>
+          <p:cNvSpPr/>
+          <p:nvPr/>
+        </p:nvSpPr>
+        <p:spPr>
+          <a:xfrm>
+            <a:off x="2254649" y="4169664"/>
             <a:ext cx="685800" cy="475488"/>
           </a:xfrm>
           <a:prstGeom prst="rect">
@@ -10505,13 +10841,13 @@
       </p:sp>
       <p:sp>
         <p:nvSpPr>
-          <p:cNvPr id="35" name="Shape 33"/>
-          <p:cNvSpPr/>
-          <p:nvPr/>
-        </p:nvSpPr>
-        <p:spPr>
-          <a:xfrm>
-            <a:off x="3639312" y="4169664"/>
+          <p:cNvPr id="38" name="Shape 36"/>
+          <p:cNvSpPr/>
+          <p:nvPr/>
+        </p:nvSpPr>
+        <p:spPr>
+          <a:xfrm>
+            <a:off x="3293146" y="4169664"/>
             <a:ext cx="685800" cy="475488"/>
           </a:xfrm>
           <a:prstGeom prst="rect">
@@ -10532,13 +10868,13 @@
       </p:sp>
       <p:sp>
         <p:nvSpPr>
-          <p:cNvPr id="36" name="Text 34"/>
-          <p:cNvSpPr/>
-          <p:nvPr/>
-        </p:nvSpPr>
-        <p:spPr>
-          <a:xfrm>
-            <a:off x="3639312" y="4169664"/>
+          <p:cNvPr id="39" name="Text 37"/>
+          <p:cNvSpPr/>
+          <p:nvPr/>
+        </p:nvSpPr>
+        <p:spPr>
+          <a:xfrm>
+            <a:off x="3293146" y="4169664"/>
             <a:ext cx="685800" cy="475488"/>
           </a:xfrm>
           <a:prstGeom prst="rect">
@@ -10571,13 +10907,13 @@
       </p:sp>
       <p:sp>
         <p:nvSpPr>
-          <p:cNvPr id="37" name="Shape 35"/>
-          <p:cNvSpPr/>
-          <p:nvPr/>
-        </p:nvSpPr>
-        <p:spPr>
-          <a:xfrm>
-            <a:off x="4850892" y="4169664"/>
+          <p:cNvPr id="40" name="Shape 38"/>
+          <p:cNvSpPr/>
+          <p:nvPr/>
+        </p:nvSpPr>
+        <p:spPr>
+          <a:xfrm>
+            <a:off x="4331643" y="4169664"/>
             <a:ext cx="685800" cy="475488"/>
           </a:xfrm>
           <a:prstGeom prst="rect">
@@ -10598,13 +10934,13 @@
       </p:sp>
       <p:sp>
         <p:nvSpPr>
-          <p:cNvPr id="38" name="Text 36"/>
-          <p:cNvSpPr/>
-          <p:nvPr/>
-        </p:nvSpPr>
-        <p:spPr>
-          <a:xfrm>
-            <a:off x="4850892" y="4169664"/>
+          <p:cNvPr id="41" name="Text 39"/>
+          <p:cNvSpPr/>
+          <p:nvPr/>
+        </p:nvSpPr>
+        <p:spPr>
+          <a:xfrm>
+            <a:off x="4331643" y="4169664"/>
             <a:ext cx="685800" cy="475488"/>
           </a:xfrm>
           <a:prstGeom prst="rect">
@@ -10637,13 +10973,13 @@
       </p:sp>
       <p:sp>
         <p:nvSpPr>
-          <p:cNvPr id="39" name="Shape 37"/>
-          <p:cNvSpPr/>
-          <p:nvPr/>
-        </p:nvSpPr>
-        <p:spPr>
-          <a:xfrm>
-            <a:off x="6062472" y="4169664"/>
+          <p:cNvPr id="42" name="Shape 40"/>
+          <p:cNvSpPr/>
+          <p:nvPr/>
+        </p:nvSpPr>
+        <p:spPr>
+          <a:xfrm>
+            <a:off x="5370141" y="4169664"/>
             <a:ext cx="685800" cy="475488"/>
           </a:xfrm>
           <a:prstGeom prst="rect">
@@ -10664,13 +11000,13 @@
       </p:sp>
       <p:sp>
         <p:nvSpPr>
-          <p:cNvPr id="40" name="Text 38"/>
-          <p:cNvSpPr/>
-          <p:nvPr/>
-        </p:nvSpPr>
-        <p:spPr>
-          <a:xfrm>
-            <a:off x="6062472" y="4169664"/>
+          <p:cNvPr id="43" name="Text 41"/>
+          <p:cNvSpPr/>
+          <p:nvPr/>
+        </p:nvSpPr>
+        <p:spPr>
+          <a:xfrm>
+            <a:off x="5370141" y="4169664"/>
             <a:ext cx="685800" cy="475488"/>
           </a:xfrm>
           <a:prstGeom prst="rect">
@@ -10703,13 +11039,13 @@
       </p:sp>
       <p:sp>
         <p:nvSpPr>
-          <p:cNvPr id="41" name="Shape 39"/>
-          <p:cNvSpPr/>
-          <p:nvPr/>
-        </p:nvSpPr>
-        <p:spPr>
-          <a:xfrm>
-            <a:off x="7274052" y="4169664"/>
+          <p:cNvPr id="44" name="Shape 42"/>
+          <p:cNvSpPr/>
+          <p:nvPr/>
+        </p:nvSpPr>
+        <p:spPr>
+          <a:xfrm>
+            <a:off x="6408638" y="4169664"/>
             <a:ext cx="685800" cy="475488"/>
           </a:xfrm>
           <a:prstGeom prst="rect">
@@ -10730,13 +11066,13 @@
       </p:sp>
       <p:sp>
         <p:nvSpPr>
-          <p:cNvPr id="42" name="Text 40"/>
-          <p:cNvSpPr/>
-          <p:nvPr/>
-        </p:nvSpPr>
-        <p:spPr>
-          <a:xfrm>
-            <a:off x="7274052" y="4169664"/>
+          <p:cNvPr id="45" name="Text 43"/>
+          <p:cNvSpPr/>
+          <p:nvPr/>
+        </p:nvSpPr>
+        <p:spPr>
+          <a:xfrm>
+            <a:off x="6408638" y="4169664"/>
             <a:ext cx="685800" cy="475488"/>
           </a:xfrm>
           <a:prstGeom prst="rect">
@@ -10762,6 +11098,72 @@
                 <a:cs typeface="Trebuchet MS" pitchFamily="34" charset="-120"/>
               </a:rPr>
               <a:t>n</a:t>
+            </a:r>
+            <a:endParaRPr lang="en-US" sz="900" dirty="0"/>
+          </a:p>
+        </p:txBody>
+      </p:sp>
+      <p:sp>
+        <p:nvSpPr>
+          <p:cNvPr id="46" name="Shape 44"/>
+          <p:cNvSpPr/>
+          <p:nvPr/>
+        </p:nvSpPr>
+        <p:spPr>
+          <a:xfrm>
+            <a:off x="7447135" y="4169664"/>
+            <a:ext cx="685800" cy="475488"/>
+          </a:xfrm>
+          <a:prstGeom prst="rect">
+            <a:avLst>
+              <a:gd name="adj" fmla="val 7692"/>
+            </a:avLst>
+          </a:prstGeom>
+          <a:solidFill>
+            <a:srgbClr val="FFFFFF"/>
+          </a:solidFill>
+          <a:ln w="12700">
+            <a:solidFill>
+              <a:srgbClr val="DB2777"/>
+            </a:solidFill>
+            <a:prstDash val="solid"/>
+          </a:ln>
+        </p:spPr>
+      </p:sp>
+      <p:sp>
+        <p:nvSpPr>
+          <p:cNvPr id="47" name="Text 45"/>
+          <p:cNvSpPr/>
+          <p:nvPr/>
+        </p:nvSpPr>
+        <p:spPr>
+          <a:xfrm>
+            <a:off x="7447135" y="4169664"/>
+            <a:ext cx="685800" cy="475488"/>
+          </a:xfrm>
+          <a:prstGeom prst="rect">
+            <a:avLst/>
+          </a:prstGeom>
+          <a:noFill/>
+          <a:ln/>
+        </p:spPr>
+        <p:txBody>
+          <a:bodyPr wrap="square" lIns="0" tIns="0" rIns="0" bIns="0" rtlCol="0" anchor="ctr"/>
+          <a:lstStyle/>
+          <a:p>
+            <a:pPr algn="ctr" indent="0" marL="0">
+              <a:buNone/>
+            </a:pPr>
+            <a:r>
+              <a:rPr lang="en-US" sz="900" b="1" dirty="0">
+                <a:solidFill>
+                  <a:srgbClr val="9D174D"/>
+                </a:solidFill>
+                <a:latin typeface="Trebuchet MS" pitchFamily="34" charset="0"/>
+                <a:ea typeface="Trebuchet MS" pitchFamily="34" charset="-122"/>
+                <a:cs typeface="Trebuchet MS" pitchFamily="34" charset="-120"/>
+              </a:rPr>
+              <a:t>ed</a:t>
             </a:r>
             <a:endParaRPr lang="en-US" sz="900" dirty="0"/>
           </a:p>
@@ -15047,7 +15449,7 @@
         </p:nvSpPr>
         <p:spPr>
           <a:xfrm>
-            <a:off x="2427732" y="4169664"/>
+            <a:off x="2254649" y="4169664"/>
             <a:ext cx="685800" cy="475488"/>
           </a:xfrm>
           <a:prstGeom prst="rect">
@@ -15074,7 +15476,7 @@
         </p:nvSpPr>
         <p:spPr>
           <a:xfrm>
-            <a:off x="2427732" y="4169664"/>
+            <a:off x="2254649" y="4169664"/>
             <a:ext cx="685800" cy="475488"/>
           </a:xfrm>
           <a:prstGeom prst="rect">
@@ -15113,7 +15515,7 @@
         </p:nvSpPr>
         <p:spPr>
           <a:xfrm>
-            <a:off x="3639312" y="4169664"/>
+            <a:off x="3293146" y="4169664"/>
             <a:ext cx="685800" cy="475488"/>
           </a:xfrm>
           <a:prstGeom prst="rect">
@@ -15140,7 +15542,7 @@
         </p:nvSpPr>
         <p:spPr>
           <a:xfrm>
-            <a:off x="3639312" y="4169664"/>
+            <a:off x="3293146" y="4169664"/>
             <a:ext cx="685800" cy="475488"/>
           </a:xfrm>
           <a:prstGeom prst="rect">
@@ -15179,7 +15581,7 @@
         </p:nvSpPr>
         <p:spPr>
           <a:xfrm>
-            <a:off x="4850892" y="4169664"/>
+            <a:off x="4331643" y="4169664"/>
             <a:ext cx="685800" cy="475488"/>
           </a:xfrm>
           <a:prstGeom prst="rect">
@@ -15206,7 +15608,7 @@
         </p:nvSpPr>
         <p:spPr>
           <a:xfrm>
-            <a:off x="4850892" y="4169664"/>
+            <a:off x="4331643" y="4169664"/>
             <a:ext cx="685800" cy="475488"/>
           </a:xfrm>
           <a:prstGeom prst="rect">
@@ -15245,7 +15647,7 @@
         </p:nvSpPr>
         <p:spPr>
           <a:xfrm>
-            <a:off x="6062472" y="4169664"/>
+            <a:off x="5370141" y="4169664"/>
             <a:ext cx="685800" cy="475488"/>
           </a:xfrm>
           <a:prstGeom prst="rect">
@@ -15272,7 +15674,7 @@
         </p:nvSpPr>
         <p:spPr>
           <a:xfrm>
-            <a:off x="6062472" y="4169664"/>
+            <a:off x="5370141" y="4169664"/>
             <a:ext cx="685800" cy="475488"/>
           </a:xfrm>
           <a:prstGeom prst="rect">
@@ -15311,7 +15713,7 @@
         </p:nvSpPr>
         <p:spPr>
           <a:xfrm>
-            <a:off x="7274052" y="4169664"/>
+            <a:off x="6408638" y="4169664"/>
             <a:ext cx="685800" cy="475488"/>
           </a:xfrm>
           <a:prstGeom prst="rect">
@@ -15338,7 +15740,7 @@
         </p:nvSpPr>
         <p:spPr>
           <a:xfrm>
-            <a:off x="7274052" y="4169664"/>
+            <a:off x="6408638" y="4169664"/>
             <a:ext cx="685800" cy="475488"/>
           </a:xfrm>
           <a:prstGeom prst="rect">
@@ -15363,7 +15765,73 @@
                 <a:ea typeface="Trebuchet MS" pitchFamily="34" charset="-122"/>
                 <a:cs typeface="Trebuchet MS" pitchFamily="34" charset="-120"/>
               </a:rPr>
-              <a:t>ess</a:t>
+              <a:t>e</a:t>
+            </a:r>
+            <a:endParaRPr lang="en-US" sz="900" dirty="0"/>
+          </a:p>
+        </p:txBody>
+      </p:sp>
+      <p:sp>
+        <p:nvSpPr>
+          <p:cNvPr id="43" name="Shape 41"/>
+          <p:cNvSpPr/>
+          <p:nvPr/>
+        </p:nvSpPr>
+        <p:spPr>
+          <a:xfrm>
+            <a:off x="7447135" y="4169664"/>
+            <a:ext cx="685800" cy="475488"/>
+          </a:xfrm>
+          <a:prstGeom prst="rect">
+            <a:avLst>
+              <a:gd name="adj" fmla="val 7692"/>
+            </a:avLst>
+          </a:prstGeom>
+          <a:solidFill>
+            <a:srgbClr val="FFFFFF"/>
+          </a:solidFill>
+          <a:ln w="12700">
+            <a:solidFill>
+              <a:srgbClr val="DB2777"/>
+            </a:solidFill>
+            <a:prstDash val="solid"/>
+          </a:ln>
+        </p:spPr>
+      </p:sp>
+      <p:sp>
+        <p:nvSpPr>
+          <p:cNvPr id="44" name="Text 42"/>
+          <p:cNvSpPr/>
+          <p:nvPr/>
+        </p:nvSpPr>
+        <p:spPr>
+          <a:xfrm>
+            <a:off x="7447135" y="4169664"/>
+            <a:ext cx="685800" cy="475488"/>
+          </a:xfrm>
+          <a:prstGeom prst="rect">
+            <a:avLst/>
+          </a:prstGeom>
+          <a:noFill/>
+          <a:ln/>
+        </p:spPr>
+        <p:txBody>
+          <a:bodyPr wrap="square" lIns="0" tIns="0" rIns="0" bIns="0" rtlCol="0" anchor="ctr"/>
+          <a:lstStyle/>
+          <a:p>
+            <a:pPr algn="ctr" indent="0" marL="0">
+              <a:buNone/>
+            </a:pPr>
+            <a:r>
+              <a:rPr lang="en-US" sz="900" b="1" dirty="0">
+                <a:solidFill>
+                  <a:srgbClr val="9D174D"/>
+                </a:solidFill>
+                <a:latin typeface="Trebuchet MS" pitchFamily="34" charset="0"/>
+                <a:ea typeface="Trebuchet MS" pitchFamily="34" charset="-122"/>
+                <a:cs typeface="Trebuchet MS" pitchFamily="34" charset="-120"/>
+              </a:rPr>
+              <a:t>ss</a:t>
             </a:r>
             <a:endParaRPr lang="en-US" sz="900" dirty="0"/>
           </a:p>
@@ -16706,7 +17174,7 @@
                 <a:ea typeface="Calibri" pitchFamily="34" charset="-122"/>
                 <a:cs typeface="Calibri" pitchFamily="34" charset="-120"/>
               </a:rPr>
-              <a:t>weakest</a:t>
+              <a:t>weakling</a:t>
             </a:r>
             <a:pPr algn="l" indent="0" marL="0">
               <a:buNone/>
@@ -16720,7 +17188,7 @@
                 <a:ea typeface="Calibri" pitchFamily="34" charset="-122"/>
                 <a:cs typeface="Calibri" pitchFamily="34" charset="-120"/>
               </a:rPr>
-              <a:t> player trained the hardest, and slowly the coach watched him </a:t>
+              <a:t> struggled to lift the box, but the </a:t>
             </a:r>
             <a:pPr algn="l" indent="0" marL="0">
               <a:buNone/>
@@ -16737,7 +17205,7 @@
                 <a:ea typeface="Calibri" pitchFamily="34" charset="-122"/>
                 <a:cs typeface="Calibri" pitchFamily="34" charset="-120"/>
               </a:rPr>
-              <a:t>weaken</a:t>
+              <a:t>weakly</a:t>
             </a:r>
             <a:pPr algn="l" indent="0" marL="0">
               <a:buNone/>
@@ -16751,7 +17219,7 @@
                 <a:ea typeface="Calibri" pitchFamily="34" charset="-122"/>
                 <a:cs typeface="Calibri" pitchFamily="34" charset="-120"/>
               </a:rPr>
-              <a:t> his opponents with his </a:t>
+              <a:t> attempt still impressed her coach, who helped her </a:t>
             </a:r>
             <a:pPr algn="l" indent="0" marL="0">
               <a:buNone/>
@@ -16768,7 +17236,7 @@
                 <a:ea typeface="Calibri" pitchFamily="34" charset="-122"/>
                 <a:cs typeface="Calibri" pitchFamily="34" charset="-120"/>
               </a:rPr>
-              <a:t>weakly</a:t>
+              <a:t>weaken</a:t>
             </a:r>
             <a:pPr algn="l" indent="0" marL="0">
               <a:buNone/>
@@ -16782,7 +17250,7 @@
                 <a:ea typeface="Calibri" pitchFamily="34" charset="-122"/>
                 <a:cs typeface="Calibri" pitchFamily="34" charset="-120"/>
               </a:rPr>
-              <a:t> disguised trick shots.</a:t>
+              <a:t> her fear of failure.</a:t>
             </a:r>
             <a:endParaRPr lang="en-US" sz="1800" dirty="0"/>
           </a:p>
@@ -16937,7 +17405,7 @@
                 <a:ea typeface="Trebuchet MS" pitchFamily="34" charset="-122"/>
                 <a:cs typeface="Trebuchet MS" pitchFamily="34" charset="-120"/>
               </a:rPr>
-              <a:t>weakest</a:t>
+              <a:t>weakling</a:t>
             </a:r>
             <a:endParaRPr lang="en-US" sz="1400" dirty="0"/>
           </a:p>
@@ -17065,7 +17533,7 @@
                 <a:ea typeface="Trebuchet MS" pitchFamily="34" charset="-122"/>
                 <a:cs typeface="Trebuchet MS" pitchFamily="34" charset="-120"/>
               </a:rPr>
-              <a:t>weaken</a:t>
+              <a:t>weakly</a:t>
             </a:r>
             <a:endParaRPr lang="en-US" sz="1400" dirty="0"/>
           </a:p>
@@ -17193,7 +17661,7 @@
                 <a:ea typeface="Trebuchet MS" pitchFamily="34" charset="-122"/>
                 <a:cs typeface="Trebuchet MS" pitchFamily="34" charset="-120"/>
               </a:rPr>
-              <a:t>weakly</a:t>
+              <a:t>weaken</a:t>
             </a:r>
             <a:endParaRPr lang="en-US" sz="1400" dirty="0"/>
           </a:p>
@@ -17663,7 +18131,7 @@
                 <a:ea typeface="Trebuchet MS" pitchFamily="34" charset="-122"/>
                 <a:cs typeface="Trebuchet MS" pitchFamily="34" charset="-120"/>
               </a:rPr>
-              <a:t>weakest</a:t>
+              <a:t>weakling</a:t>
             </a:r>
             <a:endParaRPr lang="en-US" sz="2800" dirty="0"/>
           </a:p>
@@ -18490,7 +18958,7 @@
                 <a:ea typeface="Trebuchet MS" pitchFamily="34" charset="-122"/>
                 <a:cs typeface="Trebuchet MS" pitchFamily="34" charset="-120"/>
               </a:rPr>
-              <a:t>weakest</a:t>
+              <a:t>weakling</a:t>
             </a:r>
             <a:endParaRPr lang="en-US" sz="2800" dirty="0"/>
           </a:p>
@@ -18691,11 +19159,11 @@
             </a:avLst>
           </a:prstGeom>
           <a:solidFill>
-            <a:srgbClr val="FCE7F3"/>
+            <a:srgbClr val="DDD6FE"/>
           </a:solidFill>
           <a:ln w="19050">
             <a:solidFill>
-              <a:srgbClr val="DB2777"/>
+              <a:srgbClr val="7C3AED"/>
             </a:solidFill>
             <a:prstDash val="solid"/>
           </a:ln>
@@ -18735,13 +19203,13 @@
             <a:r>
               <a:rPr lang="en-US" sz="1300" b="1" dirty="0">
                 <a:solidFill>
-                  <a:srgbClr val="9D174D"/>
+                  <a:srgbClr val="4C1D95"/>
                 </a:solidFill>
                 <a:latin typeface="Trebuchet MS" pitchFamily="34" charset="0"/>
                 <a:ea typeface="Trebuchet MS" pitchFamily="34" charset="-122"/>
                 <a:cs typeface="Trebuchet MS" pitchFamily="34" charset="-120"/>
               </a:rPr>
-              <a:t>est</a:t>
+              <a:t>ling</a:t>
             </a:r>
             <a:endParaRPr lang="en-US" sz="1300" dirty="0"/>
           </a:p>
@@ -18780,7 +19248,7 @@
                 <a:ea typeface="Calibri" pitchFamily="34" charset="-122"/>
                 <a:cs typeface="Calibri" pitchFamily="34" charset="-120"/>
               </a:rPr>
-              <a:t>the most (superlative)</a:t>
+              <a:t>a small or lesser person or thing</a:t>
             </a:r>
             <a:endParaRPr lang="en-US" sz="850" dirty="0"/>
           </a:p>
@@ -19475,7 +19943,7 @@
                 <a:ea typeface="Trebuchet MS" pitchFamily="34" charset="-122"/>
                 <a:cs typeface="Trebuchet MS" pitchFamily="34" charset="-120"/>
               </a:rPr>
-              <a:t>weakest</a:t>
+              <a:t>weakling</a:t>
             </a:r>
             <a:endParaRPr lang="en-US" sz="2800" dirty="0"/>
           </a:p>
@@ -19676,11 +20144,11 @@
             </a:avLst>
           </a:prstGeom>
           <a:solidFill>
-            <a:srgbClr val="FCE7F3"/>
+            <a:srgbClr val="DDD6FE"/>
           </a:solidFill>
           <a:ln w="19050">
             <a:solidFill>
-              <a:srgbClr val="DB2777"/>
+              <a:srgbClr val="7C3AED"/>
             </a:solidFill>
             <a:prstDash val="solid"/>
           </a:ln>
@@ -19720,13 +20188,13 @@
             <a:r>
               <a:rPr lang="en-US" sz="1300" b="1" dirty="0">
                 <a:solidFill>
-                  <a:srgbClr val="9D174D"/>
+                  <a:srgbClr val="4C1D95"/>
                 </a:solidFill>
                 <a:latin typeface="Trebuchet MS" pitchFamily="34" charset="0"/>
                 <a:ea typeface="Trebuchet MS" pitchFamily="34" charset="-122"/>
                 <a:cs typeface="Trebuchet MS" pitchFamily="34" charset="-120"/>
               </a:rPr>
-              <a:t>est</a:t>
+              <a:t>ling</a:t>
             </a:r>
             <a:endParaRPr lang="en-US" sz="1300" dirty="0"/>
           </a:p>
@@ -19765,7 +20233,7 @@
                 <a:ea typeface="Calibri" pitchFamily="34" charset="-122"/>
                 <a:cs typeface="Calibri" pitchFamily="34" charset="-120"/>
               </a:rPr>
-              <a:t>the most (superlative)</a:t>
+              <a:t>a small or lesser person or thing</a:t>
             </a:r>
             <a:endParaRPr lang="en-US" sz="850" dirty="0"/>
           </a:p>
@@ -20029,7 +20497,7 @@
                 <a:ea typeface="Trebuchet MS" pitchFamily="34" charset="-122"/>
                 <a:cs typeface="Trebuchet MS" pitchFamily="34" charset="-120"/>
               </a:rPr>
-              <a:t>est</a:t>
+              <a:t>ling</a:t>
             </a:r>
             <a:endParaRPr lang="en-US" sz="1400" dirty="0"/>
           </a:p>
@@ -20592,7 +21060,7 @@
                 <a:ea typeface="Trebuchet MS" pitchFamily="34" charset="-122"/>
                 <a:cs typeface="Trebuchet MS" pitchFamily="34" charset="-120"/>
               </a:rPr>
-              <a:t>weakest</a:t>
+              <a:t>weakling</a:t>
             </a:r>
             <a:endParaRPr lang="en-US" sz="2800" dirty="0"/>
           </a:p>
@@ -20793,11 +21261,11 @@
             </a:avLst>
           </a:prstGeom>
           <a:solidFill>
-            <a:srgbClr val="FCE7F3"/>
+            <a:srgbClr val="DDD6FE"/>
           </a:solidFill>
           <a:ln w="19050">
             <a:solidFill>
-              <a:srgbClr val="DB2777"/>
+              <a:srgbClr val="7C3AED"/>
             </a:solidFill>
             <a:prstDash val="solid"/>
           </a:ln>
@@ -20837,13 +21305,13 @@
             <a:r>
               <a:rPr lang="en-US" sz="1300" b="1" dirty="0">
                 <a:solidFill>
-                  <a:srgbClr val="9D174D"/>
+                  <a:srgbClr val="4C1D95"/>
                 </a:solidFill>
                 <a:latin typeface="Trebuchet MS" pitchFamily="34" charset="0"/>
                 <a:ea typeface="Trebuchet MS" pitchFamily="34" charset="-122"/>
                 <a:cs typeface="Trebuchet MS" pitchFamily="34" charset="-120"/>
               </a:rPr>
-              <a:t>est</a:t>
+              <a:t>ling</a:t>
             </a:r>
             <a:endParaRPr lang="en-US" sz="1300" dirty="0"/>
           </a:p>
@@ -20882,7 +21350,7 @@
                 <a:ea typeface="Calibri" pitchFamily="34" charset="-122"/>
                 <a:cs typeface="Calibri" pitchFamily="34" charset="-120"/>
               </a:rPr>
-              <a:t>the most (superlative)</a:t>
+              <a:t>a small or lesser person or thing</a:t>
             </a:r>
             <a:endParaRPr lang="en-US" sz="850" dirty="0"/>
           </a:p>
@@ -21146,7 +21614,7 @@
                 <a:ea typeface="Trebuchet MS" pitchFamily="34" charset="-122"/>
                 <a:cs typeface="Trebuchet MS" pitchFamily="34" charset="-120"/>
               </a:rPr>
-              <a:t>est</a:t>
+              <a:t>ling</a:t>
             </a:r>
             <a:endParaRPr lang="en-US" sz="1400" dirty="0"/>
           </a:p>
@@ -21503,7 +21971,7 @@
                 <a:ea typeface="Trebuchet MS" pitchFamily="34" charset="-122"/>
                 <a:cs typeface="Trebuchet MS" pitchFamily="34" charset="-120"/>
               </a:rPr>
-              <a:t>e</a:t>
+              <a:t>l</a:t>
             </a:r>
             <a:endParaRPr lang="en-US" sz="900" dirty="0"/>
           </a:p>
@@ -21569,7 +22037,7 @@
                 <a:ea typeface="Trebuchet MS" pitchFamily="34" charset="-122"/>
                 <a:cs typeface="Trebuchet MS" pitchFamily="34" charset="-120"/>
               </a:rPr>
-              <a:t>s</a:t>
+              <a:t>i</a:t>
             </a:r>
             <a:endParaRPr lang="en-US" sz="900" dirty="0"/>
           </a:p>
@@ -21635,7 +22103,7 @@
                 <a:ea typeface="Trebuchet MS" pitchFamily="34" charset="-122"/>
                 <a:cs typeface="Trebuchet MS" pitchFamily="34" charset="-120"/>
               </a:rPr>
-              <a:t>t</a:t>
+              <a:t>ng</a:t>
             </a:r>
             <a:endParaRPr lang="en-US" sz="900" dirty="0"/>
           </a:p>
@@ -22066,7 +22534,7 @@
                 <a:ea typeface="Trebuchet MS" pitchFamily="34" charset="-122"/>
                 <a:cs typeface="Trebuchet MS" pitchFamily="34" charset="-120"/>
               </a:rPr>
-              <a:t>weaken</a:t>
+              <a:t>weakly</a:t>
             </a:r>
             <a:endParaRPr lang="en-US" sz="2800" dirty="0"/>
           </a:p>
@@ -22893,7 +23361,7 @@
                 <a:ea typeface="Trebuchet MS" pitchFamily="34" charset="-122"/>
                 <a:cs typeface="Trebuchet MS" pitchFamily="34" charset="-120"/>
               </a:rPr>
-              <a:t>weaken</a:t>
+              <a:t>weakly</a:t>
             </a:r>
             <a:endParaRPr lang="en-US" sz="2800" dirty="0"/>
           </a:p>
@@ -23144,7 +23612,7 @@
                 <a:ea typeface="Trebuchet MS" pitchFamily="34" charset="-122"/>
                 <a:cs typeface="Trebuchet MS" pitchFamily="34" charset="-120"/>
               </a:rPr>
-              <a:t>en</a:t>
+              <a:t>ly</a:t>
             </a:r>
             <a:endParaRPr lang="en-US" sz="1300" dirty="0"/>
           </a:p>
@@ -23183,7 +23651,7 @@
                 <a:ea typeface="Calibri" pitchFamily="34" charset="-122"/>
                 <a:cs typeface="Calibri" pitchFamily="34" charset="-120"/>
               </a:rPr>
-              <a:t>to make or become</a:t>
+              <a:t>in a certain way</a:t>
             </a:r>
             <a:endParaRPr lang="en-US" sz="850" dirty="0"/>
           </a:p>
@@ -24597,7 +25065,7 @@
                 <a:ea typeface="Trebuchet MS" pitchFamily="34" charset="-122"/>
                 <a:cs typeface="Trebuchet MS" pitchFamily="34" charset="-120"/>
               </a:rPr>
-              <a:t>weaken</a:t>
+              <a:t>weakly</a:t>
             </a:r>
             <a:endParaRPr lang="en-US" sz="2800" dirty="0"/>
           </a:p>
@@ -24848,7 +25316,7 @@
                 <a:ea typeface="Trebuchet MS" pitchFamily="34" charset="-122"/>
                 <a:cs typeface="Trebuchet MS" pitchFamily="34" charset="-120"/>
               </a:rPr>
-              <a:t>en</a:t>
+              <a:t>ly</a:t>
             </a:r>
             <a:endParaRPr lang="en-US" sz="1300" dirty="0"/>
           </a:p>
@@ -24887,7 +25355,7 @@
                 <a:ea typeface="Calibri" pitchFamily="34" charset="-122"/>
                 <a:cs typeface="Calibri" pitchFamily="34" charset="-120"/>
               </a:rPr>
-              <a:t>to make or become</a:t>
+              <a:t>in a certain way</a:t>
             </a:r>
             <a:endParaRPr lang="en-US" sz="850" dirty="0"/>
           </a:p>
@@ -25151,7 +25619,7 @@
                 <a:ea typeface="Trebuchet MS" pitchFamily="34" charset="-122"/>
                 <a:cs typeface="Trebuchet MS" pitchFamily="34" charset="-120"/>
               </a:rPr>
-              <a:t>en</a:t>
+              <a:t>ly</a:t>
             </a:r>
             <a:endParaRPr lang="en-US" sz="1400" dirty="0"/>
           </a:p>
@@ -25714,7 +26182,7 @@
                 <a:ea typeface="Trebuchet MS" pitchFamily="34" charset="-122"/>
                 <a:cs typeface="Trebuchet MS" pitchFamily="34" charset="-120"/>
               </a:rPr>
-              <a:t>weaken</a:t>
+              <a:t>weakly</a:t>
             </a:r>
             <a:endParaRPr lang="en-US" sz="2800" dirty="0"/>
           </a:p>
@@ -25965,7 +26433,7 @@
                 <a:ea typeface="Trebuchet MS" pitchFamily="34" charset="-122"/>
                 <a:cs typeface="Trebuchet MS" pitchFamily="34" charset="-120"/>
               </a:rPr>
-              <a:t>en</a:t>
+              <a:t>ly</a:t>
             </a:r>
             <a:endParaRPr lang="en-US" sz="1300" dirty="0"/>
           </a:p>
@@ -26004,7 +26472,7 @@
                 <a:ea typeface="Calibri" pitchFamily="34" charset="-122"/>
                 <a:cs typeface="Calibri" pitchFamily="34" charset="-120"/>
               </a:rPr>
-              <a:t>to make or become</a:t>
+              <a:t>in a certain way</a:t>
             </a:r>
             <a:endParaRPr lang="en-US" sz="850" dirty="0"/>
           </a:p>
@@ -26268,7 +26736,7 @@
                 <a:ea typeface="Trebuchet MS" pitchFamily="34" charset="-122"/>
                 <a:cs typeface="Trebuchet MS" pitchFamily="34" charset="-120"/>
               </a:rPr>
-              <a:t>en</a:t>
+              <a:t>ly</a:t>
             </a:r>
             <a:endParaRPr lang="en-US" sz="1400" dirty="0"/>
           </a:p>
@@ -26625,7 +27093,7 @@
                 <a:ea typeface="Trebuchet MS" pitchFamily="34" charset="-122"/>
                 <a:cs typeface="Trebuchet MS" pitchFamily="34" charset="-120"/>
               </a:rPr>
-              <a:t>e</a:t>
+              <a:t>l</a:t>
             </a:r>
             <a:endParaRPr lang="en-US" sz="900" dirty="0"/>
           </a:p>
@@ -26691,7 +27159,7 @@
                 <a:ea typeface="Trebuchet MS" pitchFamily="34" charset="-122"/>
                 <a:cs typeface="Trebuchet MS" pitchFamily="34" charset="-120"/>
               </a:rPr>
-              <a:t>n</a:t>
+              <a:t>y</a:t>
             </a:r>
             <a:endParaRPr lang="en-US" sz="900" dirty="0"/>
           </a:p>
@@ -27122,7 +27590,7 @@
                 <a:ea typeface="Trebuchet MS" pitchFamily="34" charset="-122"/>
                 <a:cs typeface="Trebuchet MS" pitchFamily="34" charset="-120"/>
               </a:rPr>
-              <a:t>weakly</a:t>
+              <a:t>weaken</a:t>
             </a:r>
             <a:endParaRPr lang="en-US" sz="2800" dirty="0"/>
           </a:p>
@@ -27949,7 +28417,7 @@
                 <a:ea typeface="Trebuchet MS" pitchFamily="34" charset="-122"/>
                 <a:cs typeface="Trebuchet MS" pitchFamily="34" charset="-120"/>
               </a:rPr>
-              <a:t>weakly</a:t>
+              <a:t>weaken</a:t>
             </a:r>
             <a:endParaRPr lang="en-US" sz="2800" dirty="0"/>
           </a:p>
@@ -28200,7 +28668,7 @@
                 <a:ea typeface="Trebuchet MS" pitchFamily="34" charset="-122"/>
                 <a:cs typeface="Trebuchet MS" pitchFamily="34" charset="-120"/>
               </a:rPr>
-              <a:t>ly</a:t>
+              <a:t>en</a:t>
             </a:r>
             <a:endParaRPr lang="en-US" sz="1300" dirty="0"/>
           </a:p>
@@ -28239,7 +28707,7 @@
                 <a:ea typeface="Calibri" pitchFamily="34" charset="-122"/>
                 <a:cs typeface="Calibri" pitchFamily="34" charset="-120"/>
               </a:rPr>
-              <a:t>in a certain way (adverb)</a:t>
+              <a:t>to make or become</a:t>
             </a:r>
             <a:endParaRPr lang="en-US" sz="850" dirty="0"/>
           </a:p>
@@ -28934,7 +29402,7 @@
                 <a:ea typeface="Trebuchet MS" pitchFamily="34" charset="-122"/>
                 <a:cs typeface="Trebuchet MS" pitchFamily="34" charset="-120"/>
               </a:rPr>
-              <a:t>weakly</a:t>
+              <a:t>weaken</a:t>
             </a:r>
             <a:endParaRPr lang="en-US" sz="2800" dirty="0"/>
           </a:p>
@@ -29185,7 +29653,7 @@
                 <a:ea typeface="Trebuchet MS" pitchFamily="34" charset="-122"/>
                 <a:cs typeface="Trebuchet MS" pitchFamily="34" charset="-120"/>
               </a:rPr>
-              <a:t>ly</a:t>
+              <a:t>en</a:t>
             </a:r>
             <a:endParaRPr lang="en-US" sz="1300" dirty="0"/>
           </a:p>
@@ -29224,7 +29692,7 @@
                 <a:ea typeface="Calibri" pitchFamily="34" charset="-122"/>
                 <a:cs typeface="Calibri" pitchFamily="34" charset="-120"/>
               </a:rPr>
-              <a:t>in a certain way (adverb)</a:t>
+              <a:t>to make or become</a:t>
             </a:r>
             <a:endParaRPr lang="en-US" sz="850" dirty="0"/>
           </a:p>
@@ -29488,7 +29956,7 @@
                 <a:ea typeface="Trebuchet MS" pitchFamily="34" charset="-122"/>
                 <a:cs typeface="Trebuchet MS" pitchFamily="34" charset="-120"/>
               </a:rPr>
-              <a:t>ly</a:t>
+              <a:t>en</a:t>
             </a:r>
             <a:endParaRPr lang="en-US" sz="1400" dirty="0"/>
           </a:p>
@@ -30051,7 +30519,7 @@
                 <a:ea typeface="Trebuchet MS" pitchFamily="34" charset="-122"/>
                 <a:cs typeface="Trebuchet MS" pitchFamily="34" charset="-120"/>
               </a:rPr>
-              <a:t>weakly</a:t>
+              <a:t>weaken</a:t>
             </a:r>
             <a:endParaRPr lang="en-US" sz="2800" dirty="0"/>
           </a:p>
@@ -30302,7 +30770,7 @@
                 <a:ea typeface="Trebuchet MS" pitchFamily="34" charset="-122"/>
                 <a:cs typeface="Trebuchet MS" pitchFamily="34" charset="-120"/>
               </a:rPr>
-              <a:t>ly</a:t>
+              <a:t>en</a:t>
             </a:r>
             <a:endParaRPr lang="en-US" sz="1300" dirty="0"/>
           </a:p>
@@ -30341,7 +30809,7 @@
                 <a:ea typeface="Calibri" pitchFamily="34" charset="-122"/>
                 <a:cs typeface="Calibri" pitchFamily="34" charset="-120"/>
               </a:rPr>
-              <a:t>in a certain way (adverb)</a:t>
+              <a:t>to make or become</a:t>
             </a:r>
             <a:endParaRPr lang="en-US" sz="850" dirty="0"/>
           </a:p>
@@ -30605,7 +31073,7 @@
                 <a:ea typeface="Trebuchet MS" pitchFamily="34" charset="-122"/>
                 <a:cs typeface="Trebuchet MS" pitchFamily="34" charset="-120"/>
               </a:rPr>
-              <a:t>ly</a:t>
+              <a:t>en</a:t>
             </a:r>
             <a:endParaRPr lang="en-US" sz="1400" dirty="0"/>
           </a:p>
@@ -30962,7 +31430,7 @@
                 <a:ea typeface="Trebuchet MS" pitchFamily="34" charset="-122"/>
                 <a:cs typeface="Trebuchet MS" pitchFamily="34" charset="-120"/>
               </a:rPr>
-              <a:t>l</a:t>
+              <a:t>e</a:t>
             </a:r>
             <a:endParaRPr lang="en-US" sz="900" dirty="0"/>
           </a:p>
@@ -31028,7 +31496,7 @@
                 <a:ea typeface="Trebuchet MS" pitchFamily="34" charset="-122"/>
                 <a:cs typeface="Trebuchet MS" pitchFamily="34" charset="-120"/>
               </a:rPr>
-              <a:t>y</a:t>
+              <a:t>n</a:t>
             </a:r>
             <a:endParaRPr lang="en-US" sz="900" dirty="0"/>
           </a:p>
@@ -32918,7 +33386,7 @@
                 <a:ea typeface="Trebuchet MS" pitchFamily="34" charset="-122"/>
                 <a:cs typeface="Trebuchet MS" pitchFamily="34" charset="-120"/>
               </a:rPr>
-              <a:t>-er</a:t>
+              <a:t>-en</a:t>
             </a:r>
             <a:endParaRPr lang="en-US" sz="1300" dirty="0"/>
           </a:p>
@@ -32982,7 +33450,7 @@
                 <a:ea typeface="Trebuchet MS" pitchFamily="34" charset="-122"/>
                 <a:cs typeface="Trebuchet MS" pitchFamily="34" charset="-120"/>
               </a:rPr>
-              <a:t>non-</a:t>
+              <a:t>over-</a:t>
             </a:r>
             <a:endParaRPr lang="en-US" sz="1300" dirty="0"/>
           </a:p>
@@ -33071,7 +33539,7 @@
                 <a:ea typeface="Trebuchet MS" pitchFamily="34" charset="-122"/>
                 <a:cs typeface="Trebuchet MS" pitchFamily="34" charset="-120"/>
               </a:rPr>
-              <a:t>-est</a:t>
+              <a:t>-er</a:t>
             </a:r>
             <a:endParaRPr lang="en-US" sz="1300" dirty="0"/>
           </a:p>
@@ -33135,7 +33603,7 @@
                 <a:ea typeface="Trebuchet MS" pitchFamily="34" charset="-122"/>
                 <a:cs typeface="Trebuchet MS" pitchFamily="34" charset="-120"/>
               </a:rPr>
-              <a:t>over-</a:t>
+              <a:t>mid-</a:t>
             </a:r>
             <a:endParaRPr lang="en-US" sz="1300" dirty="0"/>
           </a:p>
@@ -33224,7 +33692,7 @@
                 <a:ea typeface="Trebuchet MS" pitchFamily="34" charset="-122"/>
                 <a:cs typeface="Trebuchet MS" pitchFamily="34" charset="-120"/>
               </a:rPr>
-              <a:t>-en</a:t>
+              <a:t>-est</a:t>
             </a:r>
             <a:endParaRPr lang="en-US" sz="1300" dirty="0"/>
           </a:p>
@@ -33288,7 +33756,7 @@
                 <a:ea typeface="Trebuchet MS" pitchFamily="34" charset="-122"/>
                 <a:cs typeface="Trebuchet MS" pitchFamily="34" charset="-120"/>
               </a:rPr>
-              <a:t>semi-</a:t>
+              <a:t>out-</a:t>
             </a:r>
             <a:endParaRPr lang="en-US" sz="1300" dirty="0"/>
           </a:p>
@@ -33441,7 +33909,7 @@
                 <a:ea typeface="Trebuchet MS" pitchFamily="34" charset="-122"/>
                 <a:cs typeface="Trebuchet MS" pitchFamily="34" charset="-120"/>
               </a:rPr>
-              <a:t>pseudo-</a:t>
+              <a:t>non-</a:t>
             </a:r>
             <a:endParaRPr lang="en-US" sz="1300" dirty="0"/>
           </a:p>
@@ -33635,7 +34103,7 @@
                 <a:ea typeface="Trebuchet MS" pitchFamily="34" charset="-122"/>
                 <a:cs typeface="Trebuchet MS" pitchFamily="34" charset="-120"/>
               </a:rPr>
-              <a:t>weak</a:t>
+              <a:t>weaken</a:t>
             </a:r>
             <a:endParaRPr lang="en-US" sz="1200" dirty="0"/>
           </a:p>
@@ -33833,7 +34301,7 @@
                 <a:ea typeface="Trebuchet MS" pitchFamily="34" charset="-122"/>
                 <a:cs typeface="Trebuchet MS" pitchFamily="34" charset="-120"/>
               </a:rPr>
-              <a:t>weaken</a:t>
+              <a:t>weakly</a:t>
             </a:r>
             <a:endParaRPr lang="en-US" sz="1200" dirty="0"/>
           </a:p>
@@ -33899,7 +34367,7 @@
                 <a:ea typeface="Trebuchet MS" pitchFamily="34" charset="-122"/>
                 <a:cs typeface="Trebuchet MS" pitchFamily="34" charset="-120"/>
               </a:rPr>
-              <a:t>weakly</a:t>
+              <a:t>weakness</a:t>
             </a:r>
             <a:endParaRPr lang="en-US" sz="1200" dirty="0"/>
           </a:p>
@@ -33965,7 +34433,7 @@
                 <a:ea typeface="Trebuchet MS" pitchFamily="34" charset="-122"/>
                 <a:cs typeface="Trebuchet MS" pitchFamily="34" charset="-120"/>
               </a:rPr>
-              <a:t>weakness</a:t>
+              <a:t>weakling</a:t>
             </a:r>
             <a:endParaRPr lang="en-US" sz="1200" dirty="0"/>
           </a:p>
@@ -34097,7 +34565,7 @@
                 <a:ea typeface="Trebuchet MS" pitchFamily="34" charset="-122"/>
                 <a:cs typeface="Trebuchet MS" pitchFamily="34" charset="-120"/>
               </a:rPr>
-              <a:t>weakling</a:t>
+              <a:t>weaknesses</a:t>
             </a:r>
             <a:endParaRPr lang="en-US" sz="1200" dirty="0"/>
           </a:p>
@@ -35285,7 +35753,7 @@
                 <a:ea typeface="Calibri" pitchFamily="34" charset="-122"/>
                 <a:cs typeface="Calibri" pitchFamily="34" charset="-120"/>
               </a:rPr>
-              <a:t>1.  The word 'weakness' contains the root 'weak' plus the suffix '-ness'.</a:t>
+              <a:t>1.  The word 'weakness' has two morphemes: 'weak' and '-ness'.</a:t>
             </a:r>
             <a:endParaRPr lang="en-US" sz="1300" dirty="0"/>
           </a:p>
@@ -35424,7 +35892,7 @@
                 <a:ea typeface="Calibri" pitchFamily="34" charset="-122"/>
                 <a:cs typeface="Calibri" pitchFamily="34" charset="-120"/>
               </a:rPr>
-              <a:t>2.  The word 'weaken' means to make something stronger.</a:t>
+              <a:t>2.  The root 'weak' comes from ancient Greek.</a:t>
             </a:r>
             <a:endParaRPr lang="en-US" sz="1300" dirty="0"/>
           </a:p>
@@ -35563,7 +36031,7 @@
                 <a:ea typeface="Calibri" pitchFamily="34" charset="-122"/>
                 <a:cs typeface="Calibri" pitchFamily="34" charset="-120"/>
               </a:rPr>
-              <a:t>3.  Adding '-er' to 'weak' makes a comparing word meaning less strong.</a:t>
+              <a:t>3.  The word 'weakly' contains the root 'weak' plus the suffix '-ly'.</a:t>
             </a:r>
             <a:endParaRPr lang="en-US" sz="1300" dirty="0"/>
           </a:p>
@@ -35702,7 +36170,7 @@
                 <a:ea typeface="Calibri" pitchFamily="34" charset="-122"/>
                 <a:cs typeface="Calibri" pitchFamily="34" charset="-120"/>
               </a:rPr>
-              <a:t>4.  The root 'weak' comes from Old English.</a:t>
+              <a:t>4.  Adding '-en' to 'weak' makes a verb meaning to become less strong.</a:t>
             </a:r>
             <a:endParaRPr lang="en-US" sz="1300" dirty="0"/>
           </a:p>
@@ -35841,7 +36309,7 @@
                 <a:ea typeface="Calibri" pitchFamily="34" charset="-122"/>
                 <a:cs typeface="Calibri" pitchFamily="34" charset="-120"/>
               </a:rPr>
-              <a:t>5.  The word 'weakly' is a noun.</a:t>
+              <a:t>5.  'Weakest' means the same thing as 'weaker'.</a:t>
             </a:r>
             <a:endParaRPr lang="en-US" sz="1300" dirty="0"/>
           </a:p>
@@ -36480,7 +36948,7 @@
                 <a:ea typeface="Trebuchet MS" pitchFamily="34" charset="-122"/>
                 <a:cs typeface="Trebuchet MS" pitchFamily="34" charset="-120"/>
               </a:rPr>
-              <a:t>weak</a:t>
+              <a:t>weaken</a:t>
             </a:r>
             <a:endParaRPr lang="en-US" sz="1300" dirty="0"/>
           </a:p>
@@ -36678,7 +37146,7 @@
                 <a:ea typeface="Trebuchet MS" pitchFamily="34" charset="-122"/>
                 <a:cs typeface="Trebuchet MS" pitchFamily="34" charset="-120"/>
               </a:rPr>
-              <a:t>weaken</a:t>
+              <a:t>weakly</a:t>
             </a:r>
             <a:endParaRPr lang="en-US" sz="1300" dirty="0"/>
           </a:p>
@@ -36744,7 +37212,7 @@
                 <a:ea typeface="Trebuchet MS" pitchFamily="34" charset="-122"/>
                 <a:cs typeface="Trebuchet MS" pitchFamily="34" charset="-120"/>
               </a:rPr>
-              <a:t>weakly</a:t>
+              <a:t>weakness</a:t>
             </a:r>
             <a:endParaRPr lang="en-US" sz="1300" dirty="0"/>
           </a:p>
@@ -36810,7 +37278,7 @@
                 <a:ea typeface="Trebuchet MS" pitchFamily="34" charset="-122"/>
                 <a:cs typeface="Trebuchet MS" pitchFamily="34" charset="-120"/>
               </a:rPr>
-              <a:t>weakness</a:t>
+              <a:t>weakling</a:t>
             </a:r>
             <a:endParaRPr lang="en-US" sz="1300" dirty="0"/>
           </a:p>
@@ -37597,7 +38065,7 @@
                 <a:ea typeface="Trebuchet MS" pitchFamily="34" charset="-122"/>
                 <a:cs typeface="Trebuchet MS" pitchFamily="34" charset="-120"/>
               </a:rPr>
-              <a:t>-er</a:t>
+              <a:t>-en</a:t>
             </a:r>
             <a:endParaRPr lang="en-US" sz="1300" dirty="0"/>
           </a:p>
@@ -37661,7 +38129,7 @@
                 <a:ea typeface="Trebuchet MS" pitchFamily="34" charset="-122"/>
                 <a:cs typeface="Trebuchet MS" pitchFamily="34" charset="-120"/>
               </a:rPr>
-              <a:t>non-</a:t>
+              <a:t>over-</a:t>
             </a:r>
             <a:endParaRPr lang="en-US" sz="1300" dirty="0"/>
           </a:p>
@@ -37750,7 +38218,7 @@
                 <a:ea typeface="Trebuchet MS" pitchFamily="34" charset="-122"/>
                 <a:cs typeface="Trebuchet MS" pitchFamily="34" charset="-120"/>
               </a:rPr>
-              <a:t>-est</a:t>
+              <a:t>-er</a:t>
             </a:r>
             <a:endParaRPr lang="en-US" sz="1300" dirty="0"/>
           </a:p>
@@ -37814,7 +38282,7 @@
                 <a:ea typeface="Trebuchet MS" pitchFamily="34" charset="-122"/>
                 <a:cs typeface="Trebuchet MS" pitchFamily="34" charset="-120"/>
               </a:rPr>
-              <a:t>over-</a:t>
+              <a:t>mid-</a:t>
             </a:r>
             <a:endParaRPr lang="en-US" sz="1300" dirty="0"/>
           </a:p>
@@ -37903,7 +38371,7 @@
                 <a:ea typeface="Trebuchet MS" pitchFamily="34" charset="-122"/>
                 <a:cs typeface="Trebuchet MS" pitchFamily="34" charset="-120"/>
               </a:rPr>
-              <a:t>-en</a:t>
+              <a:t>-est</a:t>
             </a:r>
             <a:endParaRPr lang="en-US" sz="1300" dirty="0"/>
           </a:p>
@@ -37967,7 +38435,7 @@
                 <a:ea typeface="Trebuchet MS" pitchFamily="34" charset="-122"/>
                 <a:cs typeface="Trebuchet MS" pitchFamily="34" charset="-120"/>
               </a:rPr>
-              <a:t>semi-</a:t>
+              <a:t>out-</a:t>
             </a:r>
             <a:endParaRPr lang="en-US" sz="1300" dirty="0"/>
           </a:p>
@@ -38120,7 +38588,7 @@
                 <a:ea typeface="Trebuchet MS" pitchFamily="34" charset="-122"/>
                 <a:cs typeface="Trebuchet MS" pitchFamily="34" charset="-120"/>
               </a:rPr>
-              <a:t>pseudo-</a:t>
+              <a:t>non-</a:t>
             </a:r>
             <a:endParaRPr lang="en-US" sz="1300" dirty="0"/>
           </a:p>
@@ -38545,7 +39013,7 @@
                 <a:ea typeface="Trebuchet MS" pitchFamily="34" charset="-122"/>
                 <a:cs typeface="Trebuchet MS" pitchFamily="34" charset="-120"/>
               </a:rPr>
-              <a:t>-er</a:t>
+              <a:t>-en</a:t>
             </a:r>
             <a:endParaRPr lang="en-US" sz="1300" dirty="0"/>
           </a:p>
@@ -38650,7 +39118,7 @@
                 <a:ea typeface="Trebuchet MS" pitchFamily="34" charset="-122"/>
                 <a:cs typeface="Trebuchet MS" pitchFamily="34" charset="-120"/>
               </a:rPr>
-              <a:t>weak</a:t>
+              <a:t>weaken</a:t>
             </a:r>
             <a:endParaRPr lang="en-US" sz="1400" dirty="0"/>
           </a:p>
@@ -39054,7 +39522,7 @@
                 <a:ea typeface="Trebuchet MS" pitchFamily="34" charset="-122"/>
                 <a:cs typeface="Trebuchet MS" pitchFamily="34" charset="-120"/>
               </a:rPr>
-              <a:t>weak</a:t>
+              <a:t>weaken</a:t>
             </a:r>
             <a:endParaRPr lang="en-US" sz="1200" dirty="0"/>
           </a:p>
@@ -39120,7 +39588,7 @@
                 <a:ea typeface="Calibri" pitchFamily="34" charset="-122"/>
                 <a:cs typeface="Calibri" pitchFamily="34" charset="-120"/>
               </a:rPr>
-              <a:t>Having the least strength of all in a group.</a:t>
+              <a:t>The most weak of all; having the least strength.</a:t>
             </a:r>
             <a:endParaRPr lang="en-US" sz="1200" dirty="0"/>
           </a:p>
@@ -39259,7 +39727,7 @@
                 <a:ea typeface="Calibri" pitchFamily="34" charset="-122"/>
                 <a:cs typeface="Calibri" pitchFamily="34" charset="-120"/>
               </a:rPr>
-              <a:t>To make something less strong or powerful.</a:t>
+              <a:t>Done without much strength or energy; in a feeble way.</a:t>
             </a:r>
             <a:endParaRPr lang="en-US" sz="1200" dirty="0"/>
           </a:p>
@@ -39471,7 +39939,7 @@
                 <a:ea typeface="Trebuchet MS" pitchFamily="34" charset="-122"/>
                 <a:cs typeface="Trebuchet MS" pitchFamily="34" charset="-120"/>
               </a:rPr>
-              <a:t>weaken</a:t>
+              <a:t>weakly</a:t>
             </a:r>
             <a:endParaRPr lang="en-US" sz="1200" dirty="0"/>
           </a:p>
@@ -39537,7 +40005,7 @@
                 <a:ea typeface="Calibri" pitchFamily="34" charset="-122"/>
                 <a:cs typeface="Calibri" pitchFamily="34" charset="-120"/>
               </a:rPr>
-              <a:t>The state of not being strong; a fault or limitation.</a:t>
+              <a:t>A person or animal that is not very strong or healthy.</a:t>
             </a:r>
             <a:endParaRPr lang="en-US" sz="1200" dirty="0"/>
           </a:p>
@@ -39610,7 +40078,7 @@
                 <a:ea typeface="Trebuchet MS" pitchFamily="34" charset="-122"/>
                 <a:cs typeface="Trebuchet MS" pitchFamily="34" charset="-120"/>
               </a:rPr>
-              <a:t>weakly</a:t>
+              <a:t>weakness</a:t>
             </a:r>
             <a:endParaRPr lang="en-US" sz="1200" dirty="0"/>
           </a:p>
@@ -39676,7 +40144,7 @@
                 <a:ea typeface="Calibri" pitchFamily="34" charset="-122"/>
                 <a:cs typeface="Calibri" pitchFamily="34" charset="-120"/>
               </a:rPr>
-              <a:t>Not strong; not having much power or energy.</a:t>
+              <a:t>To make something less strong or powerful.</a:t>
             </a:r>
             <a:endParaRPr lang="en-US" sz="1200" dirty="0"/>
           </a:p>
@@ -39749,7 +40217,7 @@
                 <a:ea typeface="Trebuchet MS" pitchFamily="34" charset="-122"/>
                 <a:cs typeface="Trebuchet MS" pitchFamily="34" charset="-120"/>
               </a:rPr>
-              <a:t>weakness</a:t>
+              <a:t>weakling</a:t>
             </a:r>
             <a:endParaRPr lang="en-US" sz="1200" dirty="0"/>
           </a:p>
@@ -39815,7 +40283,7 @@
                 <a:ea typeface="Calibri" pitchFamily="34" charset="-122"/>
                 <a:cs typeface="Calibri" pitchFamily="34" charset="-120"/>
               </a:rPr>
-              <a:t>Done without much strength or energy.</a:t>
+              <a:t>The state of not being strong; a fault or problem area.</a:t>
             </a:r>
             <a:endParaRPr lang="en-US" sz="1200" dirty="0"/>
           </a:p>
@@ -39954,7 +40422,7 @@
                 <a:ea typeface="Calibri" pitchFamily="34" charset="-122"/>
                 <a:cs typeface="Calibri" pitchFamily="34" charset="-120"/>
               </a:rPr>
-              <a:t>Having less strength than something else.</a:t>
+              <a:t>More weak than something else; having less strength.</a:t>
             </a:r>
             <a:endParaRPr lang="en-US" sz="1200" dirty="0"/>
           </a:p>
@@ -40449,7 +40917,7 @@
                 <a:ea typeface="Calibri" pitchFamily="34" charset="-122"/>
                 <a:cs typeface="Calibri" pitchFamily="34" charset="-120"/>
               </a:rPr>
-              <a:t>The weakened bridge was too dangerous for cars to drive across.</a:t>
+              <a:t>The weakened bridge was closed to traffic until the engineers could repair it.</a:t>
             </a:r>
             <a:endParaRPr lang="en-US" sz="1500" dirty="0"/>
           </a:p>
@@ -40613,7 +41081,7 @@
                 <a:ea typeface="Calibri" pitchFamily="34" charset="-122"/>
                 <a:cs typeface="Calibri" pitchFamily="34" charset="-120"/>
               </a:rPr>
-              <a:t>She felt weakness in her legs after the long race at the school carnival.</a:t>
+              <a:t>She felt her weakness was public speaking, so she practised every day to improve.</a:t>
             </a:r>
             <a:endParaRPr lang="en-US" sz="1500" dirty="0"/>
           </a:p>
@@ -40777,7 +41245,7 @@
                 <a:ea typeface="Calibri" pitchFamily="34" charset="-122"/>
                 <a:cs typeface="Calibri" pitchFamily="34" charset="-120"/>
               </a:rPr>
-              <a:t>The weakling plant in the corner of the garden needed extra water and sunlight to grow.</a:t>
+              <a:t>The sick puppy was so weakly that it could barely lift its head from the blanket.</a:t>
             </a:r>
             <a:endParaRPr lang="en-US" sz="1500" dirty="0"/>
           </a:p>
